--- a/Minhas Aulas/Aula dois.pptx
+++ b/Minhas Aulas/Aula dois.pptx
@@ -138,1088 +138,29 @@
 </p:presentation>
 </file>
 
-<file path=ppt/revisionInfo.xml><?xml version="1.0" encoding="utf-8"?>
-<p1510:revInfo xmlns:a="http://schemas.openxmlformats.org/drawingml/2006/main" xmlns:r="http://schemas.openxmlformats.org/officeDocument/2006/relationships" xmlns:p1510="http://schemas.microsoft.com/office/powerpoint/2015/10/main">
-  <p1510:revLst>
-    <p1510:client id="{205266CF-9852-4ABA-8392-D6CFCEA03C36}" v="94" dt="2024-03-04T16:14:54.463"/>
-    <p1510:client id="{9DC39C1C-1C16-4384-A367-19A04739DB70}" v="414" dt="2024-03-04T22:34:02.511"/>
-  </p1510:revLst>
-</p1510:revInfo>
-</file>
-
 <file path=ppt/changesInfos/changesInfo1.xml><?xml version="1.0" encoding="utf-8"?>
 <pc:chgInfo xmlns:a="http://schemas.openxmlformats.org/drawingml/2006/main" xmlns:r="http://schemas.openxmlformats.org/officeDocument/2006/relationships" xmlns:ac="http://schemas.microsoft.com/office/drawing/2013/main/command" xmlns:pc="http://schemas.microsoft.com/office/powerpoint/2013/main/command">
   <pc:docChgLst>
-    <pc:chgData name="Gabriel Silva dos Anjos" userId="8fb4646b515390da" providerId="LiveId" clId="{205266CF-9852-4ABA-8392-D6CFCEA03C36}"/>
-    <pc:docChg chg="undo custSel addSld delSld modSld sldOrd">
-      <pc:chgData name="Gabriel Silva dos Anjos" userId="8fb4646b515390da" providerId="LiveId" clId="{205266CF-9852-4ABA-8392-D6CFCEA03C36}" dt="2024-03-04T16:14:54.463" v="1324" actId="20577"/>
+    <pc:chgData name="Gabriel Silva dos Anjos" userId="8fb4646b515390da" providerId="LiveId" clId="{B8BEB7C2-69DD-4275-B93B-F0AA18BDC585}"/>
+    <pc:docChg chg="modSld">
+      <pc:chgData name="Gabriel Silva dos Anjos" userId="8fb4646b515390da" providerId="LiveId" clId="{B8BEB7C2-69DD-4275-B93B-F0AA18BDC585}" dt="2026-01-03T05:01:43.965" v="3" actId="20577"/>
       <pc:docMkLst>
         <pc:docMk/>
       </pc:docMkLst>
-      <pc:sldChg chg="modSp del mod modAnim">
-        <pc:chgData name="Gabriel Silva dos Anjos" userId="8fb4646b515390da" providerId="LiveId" clId="{205266CF-9852-4ABA-8392-D6CFCEA03C36}" dt="2024-02-26T15:25:34.356" v="793" actId="47"/>
-        <pc:sldMkLst>
-          <pc:docMk/>
-          <pc:sldMk cId="1007473992" sldId="279"/>
-        </pc:sldMkLst>
-        <pc:spChg chg="mod">
-          <ac:chgData name="Gabriel Silva dos Anjos" userId="8fb4646b515390da" providerId="LiveId" clId="{205266CF-9852-4ABA-8392-D6CFCEA03C36}" dt="2024-02-26T15:13:07.134" v="70" actId="27636"/>
-          <ac:spMkLst>
-            <pc:docMk/>
-            <pc:sldMk cId="1007473992" sldId="279"/>
-            <ac:spMk id="3" creationId="{DBB5C06C-14B8-A6A8-6C77-2D6A472F29DA}"/>
-          </ac:spMkLst>
-        </pc:spChg>
-      </pc:sldChg>
-      <pc:sldChg chg="addSp delSp del mod ord">
-        <pc:chgData name="Gabriel Silva dos Anjos" userId="8fb4646b515390da" providerId="LiveId" clId="{205266CF-9852-4ABA-8392-D6CFCEA03C36}" dt="2024-02-26T15:49:48.393" v="870" actId="47"/>
-        <pc:sldMkLst>
-          <pc:docMk/>
-          <pc:sldMk cId="3925268766" sldId="285"/>
-        </pc:sldMkLst>
-        <pc:spChg chg="add del">
-          <ac:chgData name="Gabriel Silva dos Anjos" userId="8fb4646b515390da" providerId="LiveId" clId="{205266CF-9852-4ABA-8392-D6CFCEA03C36}" dt="2024-02-26T15:32:51.498" v="795" actId="22"/>
-          <ac:spMkLst>
-            <pc:docMk/>
-            <pc:sldMk cId="3925268766" sldId="285"/>
-            <ac:spMk id="6" creationId="{3B482EE0-E04C-CFC3-F765-DF744B507E0E}"/>
-          </ac:spMkLst>
-        </pc:spChg>
-      </pc:sldChg>
-      <pc:sldChg chg="modSp del modAnim">
-        <pc:chgData name="Gabriel Silva dos Anjos" userId="8fb4646b515390da" providerId="LiveId" clId="{205266CF-9852-4ABA-8392-D6CFCEA03C36}" dt="2024-02-26T15:24:34.827" v="792" actId="47"/>
-        <pc:sldMkLst>
-          <pc:docMk/>
-          <pc:sldMk cId="3337641168" sldId="287"/>
-        </pc:sldMkLst>
-        <pc:spChg chg="mod">
-          <ac:chgData name="Gabriel Silva dos Anjos" userId="8fb4646b515390da" providerId="LiveId" clId="{205266CF-9852-4ABA-8392-D6CFCEA03C36}" dt="2024-02-26T15:04:12.428" v="62" actId="20577"/>
-          <ac:spMkLst>
-            <pc:docMk/>
-            <pc:sldMk cId="3337641168" sldId="287"/>
-            <ac:spMk id="3" creationId="{EFF206C7-98CD-768F-ADD1-CBCC3E6B6EE9}"/>
-          </ac:spMkLst>
-        </pc:spChg>
-      </pc:sldChg>
-      <pc:sldChg chg="del">
-        <pc:chgData name="Gabriel Silva dos Anjos" userId="8fb4646b515390da" providerId="LiveId" clId="{205266CF-9852-4ABA-8392-D6CFCEA03C36}" dt="2024-03-04T16:03:09.857" v="1321" actId="2696"/>
-        <pc:sldMkLst>
-          <pc:docMk/>
-          <pc:sldMk cId="3294555001" sldId="292"/>
-        </pc:sldMkLst>
-      </pc:sldChg>
-      <pc:sldChg chg="modSp">
-        <pc:chgData name="Gabriel Silva dos Anjos" userId="8fb4646b515390da" providerId="LiveId" clId="{205266CF-9852-4ABA-8392-D6CFCEA03C36}" dt="2024-03-04T16:14:54.463" v="1324" actId="20577"/>
-        <pc:sldMkLst>
-          <pc:docMk/>
-          <pc:sldMk cId="2360096622" sldId="294"/>
-        </pc:sldMkLst>
-        <pc:spChg chg="mod">
-          <ac:chgData name="Gabriel Silva dos Anjos" userId="8fb4646b515390da" providerId="LiveId" clId="{205266CF-9852-4ABA-8392-D6CFCEA03C36}" dt="2024-03-04T16:14:54.463" v="1324" actId="20577"/>
-          <ac:spMkLst>
-            <pc:docMk/>
-            <pc:sldMk cId="2360096622" sldId="294"/>
-            <ac:spMk id="8" creationId="{AAD15F82-D85E-E68F-EFFB-27DBDB39993C}"/>
-          </ac:spMkLst>
-        </pc:spChg>
-      </pc:sldChg>
-      <pc:sldChg chg="addSp modSp new">
-        <pc:chgData name="Gabriel Silva dos Anjos" userId="8fb4646b515390da" providerId="LiveId" clId="{205266CF-9852-4ABA-8392-D6CFCEA03C36}" dt="2024-02-22T15:57:21.270" v="3" actId="14100"/>
-        <pc:sldMkLst>
-          <pc:docMk/>
-          <pc:sldMk cId="1926013168" sldId="295"/>
-        </pc:sldMkLst>
-        <pc:picChg chg="add mod">
-          <ac:chgData name="Gabriel Silva dos Anjos" userId="8fb4646b515390da" providerId="LiveId" clId="{205266CF-9852-4ABA-8392-D6CFCEA03C36}" dt="2024-02-22T15:57:21.270" v="3" actId="14100"/>
-          <ac:picMkLst>
-            <pc:docMk/>
-            <pc:sldMk cId="1926013168" sldId="295"/>
-            <ac:picMk id="4" creationId="{132E6132-4C57-719E-0115-FB836E1D63EC}"/>
-          </ac:picMkLst>
-        </pc:picChg>
-      </pc:sldChg>
-      <pc:sldChg chg="modSp new mod">
-        <pc:chgData name="Gabriel Silva dos Anjos" userId="8fb4646b515390da" providerId="LiveId" clId="{205266CF-9852-4ABA-8392-D6CFCEA03C36}" dt="2024-02-26T15:18:08.718" v="383" actId="20577"/>
+      <pc:sldChg chg="modSp mod">
+        <pc:chgData name="Gabriel Silva dos Anjos" userId="8fb4646b515390da" providerId="LiveId" clId="{B8BEB7C2-69DD-4275-B93B-F0AA18BDC585}" dt="2026-01-03T05:01:43.965" v="3" actId="20577"/>
         <pc:sldMkLst>
           <pc:docMk/>
           <pc:sldMk cId="1311818776" sldId="296"/>
         </pc:sldMkLst>
         <pc:spChg chg="mod">
-          <ac:chgData name="Gabriel Silva dos Anjos" userId="8fb4646b515390da" providerId="LiveId" clId="{205266CF-9852-4ABA-8392-D6CFCEA03C36}" dt="2024-02-26T15:13:45.878" v="101" actId="207"/>
-          <ac:spMkLst>
-            <pc:docMk/>
-            <pc:sldMk cId="1311818776" sldId="296"/>
-            <ac:spMk id="2" creationId="{C96FE754-F0C9-2BE8-3624-1874C5D8EF23}"/>
-          </ac:spMkLst>
-        </pc:spChg>
-        <pc:spChg chg="mod">
-          <ac:chgData name="Gabriel Silva dos Anjos" userId="8fb4646b515390da" providerId="LiveId" clId="{205266CF-9852-4ABA-8392-D6CFCEA03C36}" dt="2024-02-26T15:18:08.718" v="383" actId="20577"/>
+          <ac:chgData name="Gabriel Silva dos Anjos" userId="8fb4646b515390da" providerId="LiveId" clId="{B8BEB7C2-69DD-4275-B93B-F0AA18BDC585}" dt="2026-01-03T05:01:43.965" v="3" actId="20577"/>
           <ac:spMkLst>
             <pc:docMk/>
             <pc:sldMk cId="1311818776" sldId="296"/>
             <ac:spMk id="3" creationId="{E0641BDC-2401-AE6B-5251-6881F6E2A25B}"/>
           </ac:spMkLst>
         </pc:spChg>
-      </pc:sldChg>
-      <pc:sldChg chg="add del">
-        <pc:chgData name="Gabriel Silva dos Anjos" userId="8fb4646b515390da" providerId="LiveId" clId="{205266CF-9852-4ABA-8392-D6CFCEA03C36}" dt="2024-02-26T15:13:21.128" v="71" actId="47"/>
-        <pc:sldMkLst>
-          <pc:docMk/>
-          <pc:sldMk cId="3967272410" sldId="296"/>
-        </pc:sldMkLst>
-      </pc:sldChg>
-      <pc:sldChg chg="modSp new mod">
-        <pc:chgData name="Gabriel Silva dos Anjos" userId="8fb4646b515390da" providerId="LiveId" clId="{205266CF-9852-4ABA-8392-D6CFCEA03C36}" dt="2024-03-04T16:03:03.869" v="1320" actId="20577"/>
-        <pc:sldMkLst>
-          <pc:docMk/>
-          <pc:sldMk cId="1321450970" sldId="297"/>
-        </pc:sldMkLst>
-        <pc:spChg chg="mod">
-          <ac:chgData name="Gabriel Silva dos Anjos" userId="8fb4646b515390da" providerId="LiveId" clId="{205266CF-9852-4ABA-8392-D6CFCEA03C36}" dt="2024-02-26T15:19:31.216" v="398" actId="20577"/>
-          <ac:spMkLst>
-            <pc:docMk/>
-            <pc:sldMk cId="1321450970" sldId="297"/>
-            <ac:spMk id="2" creationId="{F10D87F3-CB1D-DE48-5870-56A0CD90FAD8}"/>
-          </ac:spMkLst>
-        </pc:spChg>
-        <pc:spChg chg="mod">
-          <ac:chgData name="Gabriel Silva dos Anjos" userId="8fb4646b515390da" providerId="LiveId" clId="{205266CF-9852-4ABA-8392-D6CFCEA03C36}" dt="2024-03-04T16:03:03.869" v="1320" actId="20577"/>
-          <ac:spMkLst>
-            <pc:docMk/>
-            <pc:sldMk cId="1321450970" sldId="297"/>
-            <ac:spMk id="3" creationId="{8C5F2AC7-AE1D-CE60-243B-91CBD36B580D}"/>
-          </ac:spMkLst>
-        </pc:spChg>
-      </pc:sldChg>
-      <pc:sldChg chg="addSp delSp modSp add mod setBg">
-        <pc:chgData name="Gabriel Silva dos Anjos" userId="8fb4646b515390da" providerId="LiveId" clId="{205266CF-9852-4ABA-8392-D6CFCEA03C36}" dt="2024-02-26T15:58:25.123" v="886" actId="207"/>
-        <pc:sldMkLst>
-          <pc:docMk/>
-          <pc:sldMk cId="2009108260" sldId="298"/>
-        </pc:sldMkLst>
-        <pc:spChg chg="mod">
-          <ac:chgData name="Gabriel Silva dos Anjos" userId="8fb4646b515390da" providerId="LiveId" clId="{205266CF-9852-4ABA-8392-D6CFCEA03C36}" dt="2024-02-26T15:33:03.098" v="807" actId="20577"/>
-          <ac:spMkLst>
-            <pc:docMk/>
-            <pc:sldMk cId="2009108260" sldId="298"/>
-            <ac:spMk id="2" creationId="{6E0269BF-6EF0-7E03-C835-13E8DDC04AE7}"/>
-          </ac:spMkLst>
-        </pc:spChg>
-        <pc:spChg chg="del">
-          <ac:chgData name="Gabriel Silva dos Anjos" userId="8fb4646b515390da" providerId="LiveId" clId="{205266CF-9852-4ABA-8392-D6CFCEA03C36}" dt="2024-02-26T15:33:59.177" v="808" actId="478"/>
-          <ac:spMkLst>
-            <pc:docMk/>
-            <pc:sldMk cId="2009108260" sldId="298"/>
-            <ac:spMk id="3" creationId="{C4FE7AAB-95EB-CA3B-6751-F1497053208D}"/>
-          </ac:spMkLst>
-        </pc:spChg>
-        <pc:spChg chg="add del mod">
-          <ac:chgData name="Gabriel Silva dos Anjos" userId="8fb4646b515390da" providerId="LiveId" clId="{205266CF-9852-4ABA-8392-D6CFCEA03C36}" dt="2024-02-26T15:34:02.324" v="810" actId="22"/>
-          <ac:spMkLst>
-            <pc:docMk/>
-            <pc:sldMk cId="2009108260" sldId="298"/>
-            <ac:spMk id="6" creationId="{F504F985-FC57-B65E-BE3B-CBBBDA39FAC0}"/>
-          </ac:spMkLst>
-        </pc:spChg>
-        <pc:graphicFrameChg chg="add mod modGraphic">
-          <ac:chgData name="Gabriel Silva dos Anjos" userId="8fb4646b515390da" providerId="LiveId" clId="{205266CF-9852-4ABA-8392-D6CFCEA03C36}" dt="2024-02-26T15:58:25.123" v="886" actId="207"/>
-          <ac:graphicFrameMkLst>
-            <pc:docMk/>
-            <pc:sldMk cId="2009108260" sldId="298"/>
-            <ac:graphicFrameMk id="9" creationId="{035A5F18-6AC6-0476-A69A-4269A2327464}"/>
-          </ac:graphicFrameMkLst>
-        </pc:graphicFrameChg>
-        <pc:picChg chg="del">
-          <ac:chgData name="Gabriel Silva dos Anjos" userId="8fb4646b515390da" providerId="LiveId" clId="{205266CF-9852-4ABA-8392-D6CFCEA03C36}" dt="2024-02-26T15:34:01.089" v="809" actId="478"/>
-          <ac:picMkLst>
-            <pc:docMk/>
-            <pc:sldMk cId="2009108260" sldId="298"/>
-            <ac:picMk id="4" creationId="{43EA5500-32A2-7CA1-5C25-41C6442CB970}"/>
-          </ac:picMkLst>
-        </pc:picChg>
-        <pc:picChg chg="add mod ord">
-          <ac:chgData name="Gabriel Silva dos Anjos" userId="8fb4646b515390da" providerId="LiveId" clId="{205266CF-9852-4ABA-8392-D6CFCEA03C36}" dt="2024-02-26T15:41:11.759" v="814" actId="1076"/>
-          <ac:picMkLst>
-            <pc:docMk/>
-            <pc:sldMk cId="2009108260" sldId="298"/>
-            <ac:picMk id="8" creationId="{0042D7A6-3F95-2DEC-6497-A968C9C7B2F8}"/>
-          </ac:picMkLst>
-        </pc:picChg>
-      </pc:sldChg>
-      <pc:sldChg chg="addSp delSp modSp new del mod">
-        <pc:chgData name="Gabriel Silva dos Anjos" userId="8fb4646b515390da" providerId="LiveId" clId="{205266CF-9852-4ABA-8392-D6CFCEA03C36}" dt="2024-02-26T15:43:00.381" v="829" actId="47"/>
-        <pc:sldMkLst>
-          <pc:docMk/>
-          <pc:sldMk cId="2791320418" sldId="299"/>
-        </pc:sldMkLst>
-        <pc:spChg chg="del">
-          <ac:chgData name="Gabriel Silva dos Anjos" userId="8fb4646b515390da" providerId="LiveId" clId="{205266CF-9852-4ABA-8392-D6CFCEA03C36}" dt="2024-02-26T15:42:51.500" v="825" actId="22"/>
-          <ac:spMkLst>
-            <pc:docMk/>
-            <pc:sldMk cId="2791320418" sldId="299"/>
-            <ac:spMk id="3" creationId="{2BD7D9FE-7852-FA8E-7094-4920C9752A88}"/>
-          </ac:spMkLst>
-        </pc:spChg>
-        <pc:picChg chg="add mod ord">
-          <ac:chgData name="Gabriel Silva dos Anjos" userId="8fb4646b515390da" providerId="LiveId" clId="{205266CF-9852-4ABA-8392-D6CFCEA03C36}" dt="2024-02-26T15:42:51.500" v="825" actId="22"/>
-          <ac:picMkLst>
-            <pc:docMk/>
-            <pc:sldMk cId="2791320418" sldId="299"/>
-            <ac:picMk id="5" creationId="{9531D693-E1D2-9046-7467-1CC8216933C6}"/>
-          </ac:picMkLst>
-        </pc:picChg>
-      </pc:sldChg>
-      <pc:sldChg chg="new del">
-        <pc:chgData name="Gabriel Silva dos Anjos" userId="8fb4646b515390da" providerId="LiveId" clId="{205266CF-9852-4ABA-8392-D6CFCEA03C36}" dt="2024-02-26T15:42:59.298" v="828" actId="47"/>
-        <pc:sldMkLst>
-          <pc:docMk/>
-          <pc:sldMk cId="3337714042" sldId="300"/>
-        </pc:sldMkLst>
-      </pc:sldChg>
-      <pc:sldChg chg="addSp delSp modSp add mod">
-        <pc:chgData name="Gabriel Silva dos Anjos" userId="8fb4646b515390da" providerId="LiveId" clId="{205266CF-9852-4ABA-8392-D6CFCEA03C36}" dt="2024-02-26T16:06:45.175" v="1148" actId="14100"/>
-        <pc:sldMkLst>
-          <pc:docMk/>
-          <pc:sldMk cId="826563758" sldId="301"/>
-        </pc:sldMkLst>
-        <pc:spChg chg="mod">
-          <ac:chgData name="Gabriel Silva dos Anjos" userId="8fb4646b515390da" providerId="LiveId" clId="{205266CF-9852-4ABA-8392-D6CFCEA03C36}" dt="2024-02-26T16:05:22.049" v="1028" actId="20577"/>
-          <ac:spMkLst>
-            <pc:docMk/>
-            <pc:sldMk cId="826563758" sldId="301"/>
-            <ac:spMk id="2" creationId="{596F7E89-39AE-BF3A-C678-2BA742FA414A}"/>
-          </ac:spMkLst>
-        </pc:spChg>
-        <pc:spChg chg="add del mod">
-          <ac:chgData name="Gabriel Silva dos Anjos" userId="8fb4646b515390da" providerId="LiveId" clId="{205266CF-9852-4ABA-8392-D6CFCEA03C36}" dt="2024-02-26T15:43:23.963" v="833" actId="22"/>
-          <ac:spMkLst>
-            <pc:docMk/>
-            <pc:sldMk cId="826563758" sldId="301"/>
-            <ac:spMk id="6" creationId="{0A31FBCA-82CE-2A10-91FF-FA36B501A652}"/>
-          </ac:spMkLst>
-        </pc:spChg>
-        <pc:spChg chg="add mod">
-          <ac:chgData name="Gabriel Silva dos Anjos" userId="8fb4646b515390da" providerId="LiveId" clId="{205266CF-9852-4ABA-8392-D6CFCEA03C36}" dt="2024-02-26T16:06:45.175" v="1148" actId="14100"/>
-          <ac:spMkLst>
-            <pc:docMk/>
-            <pc:sldMk cId="826563758" sldId="301"/>
-            <ac:spMk id="13" creationId="{2986F841-3740-7BC3-82DA-666E3114716F}"/>
-          </ac:spMkLst>
-        </pc:spChg>
-        <pc:graphicFrameChg chg="del mod modGraphic">
-          <ac:chgData name="Gabriel Silva dos Anjos" userId="8fb4646b515390da" providerId="LiveId" clId="{205266CF-9852-4ABA-8392-D6CFCEA03C36}" dt="2024-02-26T15:47:45.491" v="840" actId="478"/>
-          <ac:graphicFrameMkLst>
-            <pc:docMk/>
-            <pc:sldMk cId="826563758" sldId="301"/>
-            <ac:graphicFrameMk id="9" creationId="{B5D3B70F-D20E-C995-CD5F-F9CE5609C3A2}"/>
-          </ac:graphicFrameMkLst>
-        </pc:graphicFrameChg>
-        <pc:graphicFrameChg chg="add mod modGraphic">
-          <ac:chgData name="Gabriel Silva dos Anjos" userId="8fb4646b515390da" providerId="LiveId" clId="{205266CF-9852-4ABA-8392-D6CFCEA03C36}" dt="2024-02-26T16:05:09" v="999" actId="1076"/>
-          <ac:graphicFrameMkLst>
-            <pc:docMk/>
-            <pc:sldMk cId="826563758" sldId="301"/>
-            <ac:graphicFrameMk id="11" creationId="{8EC23CE2-9F56-9513-428D-33F314F1086C}"/>
-          </ac:graphicFrameMkLst>
-        </pc:graphicFrameChg>
-        <pc:graphicFrameChg chg="add mod">
-          <ac:chgData name="Gabriel Silva dos Anjos" userId="8fb4646b515390da" providerId="LiveId" clId="{205266CF-9852-4ABA-8392-D6CFCEA03C36}" dt="2024-02-26T15:56:15.308" v="881" actId="1076"/>
-          <ac:graphicFrameMkLst>
-            <pc:docMk/>
-            <pc:sldMk cId="826563758" sldId="301"/>
-            <ac:graphicFrameMk id="12" creationId="{2595E35C-4E78-410B-D3B3-96F0A00A1D45}"/>
-          </ac:graphicFrameMkLst>
-        </pc:graphicFrameChg>
-        <pc:picChg chg="add del">
-          <ac:chgData name="Gabriel Silva dos Anjos" userId="8fb4646b515390da" providerId="LiveId" clId="{205266CF-9852-4ABA-8392-D6CFCEA03C36}" dt="2024-02-26T15:43:16.022" v="831" actId="478"/>
-          <ac:picMkLst>
-            <pc:docMk/>
-            <pc:sldMk cId="826563758" sldId="301"/>
-            <ac:picMk id="4" creationId="{535B7595-1232-7D1A-B975-2F2CBAD7A142}"/>
-          </ac:picMkLst>
-        </pc:picChg>
-        <pc:picChg chg="del">
-          <ac:chgData name="Gabriel Silva dos Anjos" userId="8fb4646b515390da" providerId="LiveId" clId="{205266CF-9852-4ABA-8392-D6CFCEA03C36}" dt="2024-02-26T15:43:22.516" v="832" actId="478"/>
-          <ac:picMkLst>
-            <pc:docMk/>
-            <pc:sldMk cId="826563758" sldId="301"/>
-            <ac:picMk id="8" creationId="{AE19A634-8DB6-B60F-AB4D-901FA08B6672}"/>
-          </ac:picMkLst>
-        </pc:picChg>
-        <pc:picChg chg="add mod ord">
-          <ac:chgData name="Gabriel Silva dos Anjos" userId="8fb4646b515390da" providerId="LiveId" clId="{205266CF-9852-4ABA-8392-D6CFCEA03C36}" dt="2024-02-26T16:05:09" v="999" actId="1076"/>
-          <ac:picMkLst>
-            <pc:docMk/>
-            <pc:sldMk cId="826563758" sldId="301"/>
-            <ac:picMk id="10" creationId="{2629ED32-9EB6-6B65-CCA4-AF734D19D9F3}"/>
-          </ac:picMkLst>
-        </pc:picChg>
-      </pc:sldChg>
-      <pc:sldChg chg="addSp delSp modSp new mod">
-        <pc:chgData name="Gabriel Silva dos Anjos" userId="8fb4646b515390da" providerId="LiveId" clId="{205266CF-9852-4ABA-8392-D6CFCEA03C36}" dt="2024-02-26T16:03:15.878" v="975" actId="1076"/>
-        <pc:sldMkLst>
-          <pc:docMk/>
-          <pc:sldMk cId="2847918905" sldId="302"/>
-        </pc:sldMkLst>
-        <pc:spChg chg="mod">
-          <ac:chgData name="Gabriel Silva dos Anjos" userId="8fb4646b515390da" providerId="LiveId" clId="{205266CF-9852-4ABA-8392-D6CFCEA03C36}" dt="2024-02-26T16:03:09.223" v="974" actId="20577"/>
-          <ac:spMkLst>
-            <pc:docMk/>
-            <pc:sldMk cId="2847918905" sldId="302"/>
-            <ac:spMk id="2" creationId="{5238033A-A796-30EE-DC57-3C0B3BFA94FC}"/>
-          </ac:spMkLst>
-        </pc:spChg>
-        <pc:spChg chg="del">
-          <ac:chgData name="Gabriel Silva dos Anjos" userId="8fb4646b515390da" providerId="LiveId" clId="{205266CF-9852-4ABA-8392-D6CFCEA03C36}" dt="2024-02-26T15:58:57.906" v="888" actId="478"/>
-          <ac:spMkLst>
-            <pc:docMk/>
-            <pc:sldMk cId="2847918905" sldId="302"/>
-            <ac:spMk id="3" creationId="{6318AA51-86D3-8374-12D8-D260B60CC576}"/>
-          </ac:spMkLst>
-        </pc:spChg>
-        <pc:graphicFrameChg chg="add mod modGraphic">
-          <ac:chgData name="Gabriel Silva dos Anjos" userId="8fb4646b515390da" providerId="LiveId" clId="{205266CF-9852-4ABA-8392-D6CFCEA03C36}" dt="2024-02-26T16:03:15.878" v="975" actId="1076"/>
-          <ac:graphicFrameMkLst>
-            <pc:docMk/>
-            <pc:sldMk cId="2847918905" sldId="302"/>
-            <ac:graphicFrameMk id="4" creationId="{6596921D-3EEA-3C27-53BB-1D7B818BCFE9}"/>
-          </ac:graphicFrameMkLst>
-        </pc:graphicFrameChg>
-      </pc:sldChg>
-      <pc:sldChg chg="addSp delSp modSp new mod">
-        <pc:chgData name="Gabriel Silva dos Anjos" userId="8fb4646b515390da" providerId="LiveId" clId="{205266CF-9852-4ABA-8392-D6CFCEA03C36}" dt="2024-02-26T16:36:24.207" v="1280" actId="1076"/>
-        <pc:sldMkLst>
-          <pc:docMk/>
-          <pc:sldMk cId="1172665844" sldId="303"/>
-        </pc:sldMkLst>
-        <pc:spChg chg="mod">
-          <ac:chgData name="Gabriel Silva dos Anjos" userId="8fb4646b515390da" providerId="LiveId" clId="{205266CF-9852-4ABA-8392-D6CFCEA03C36}" dt="2024-02-26T16:03:58.054" v="994" actId="20577"/>
-          <ac:spMkLst>
-            <pc:docMk/>
-            <pc:sldMk cId="1172665844" sldId="303"/>
-            <ac:spMk id="2" creationId="{EC09B0E7-1F11-FEDE-7BA4-FB6A8AEB717F}"/>
-          </ac:spMkLst>
-        </pc:spChg>
-        <pc:spChg chg="del">
-          <ac:chgData name="Gabriel Silva dos Anjos" userId="8fb4646b515390da" providerId="LiveId" clId="{205266CF-9852-4ABA-8392-D6CFCEA03C36}" dt="2024-02-26T16:04:15.518" v="995" actId="22"/>
-          <ac:spMkLst>
-            <pc:docMk/>
-            <pc:sldMk cId="1172665844" sldId="303"/>
-            <ac:spMk id="3" creationId="{9DD930D9-6CBE-0DCA-0993-08858D9B4F36}"/>
-          </ac:spMkLst>
-        </pc:spChg>
-        <pc:spChg chg="add mod">
-          <ac:chgData name="Gabriel Silva dos Anjos" userId="8fb4646b515390da" providerId="LiveId" clId="{205266CF-9852-4ABA-8392-D6CFCEA03C36}" dt="2024-02-26T16:36:24.207" v="1280" actId="1076"/>
-          <ac:spMkLst>
-            <pc:docMk/>
-            <pc:sldMk cId="1172665844" sldId="303"/>
-            <ac:spMk id="7" creationId="{866930D0-7A84-2B13-757E-818904B18FD2}"/>
-          </ac:spMkLst>
-        </pc:spChg>
-        <pc:graphicFrameChg chg="add mod modGraphic">
-          <ac:chgData name="Gabriel Silva dos Anjos" userId="8fb4646b515390da" providerId="LiveId" clId="{205266CF-9852-4ABA-8392-D6CFCEA03C36}" dt="2024-02-26T16:35:16.082" v="1230"/>
-          <ac:graphicFrameMkLst>
-            <pc:docMk/>
-            <pc:sldMk cId="1172665844" sldId="303"/>
-            <ac:graphicFrameMk id="6" creationId="{8A2216A1-7604-7A5A-8642-4F58ED9CE8D0}"/>
-          </ac:graphicFrameMkLst>
-        </pc:graphicFrameChg>
-        <pc:picChg chg="add mod ord">
-          <ac:chgData name="Gabriel Silva dos Anjos" userId="8fb4646b515390da" providerId="LiveId" clId="{205266CF-9852-4ABA-8392-D6CFCEA03C36}" dt="2024-02-26T16:35:00.255" v="1229" actId="1076"/>
-          <ac:picMkLst>
-            <pc:docMk/>
-            <pc:sldMk cId="1172665844" sldId="303"/>
-            <ac:picMk id="5" creationId="{BC090374-9A08-AEA3-A7A7-0145072A1388}"/>
-          </ac:picMkLst>
-        </pc:picChg>
-      </pc:sldChg>
-    </pc:docChg>
-  </pc:docChgLst>
-  <pc:docChgLst>
-    <pc:chgData name="Gabriel Silva dos Anjos" userId="8fb4646b515390da" providerId="LiveId" clId="{F65CE0AE-0A99-418D-A782-0919286F9FD3}"/>
-    <pc:docChg chg="addSld modSld">
-      <pc:chgData name="Gabriel Silva dos Anjos" userId="8fb4646b515390da" providerId="LiveId" clId="{F65CE0AE-0A99-418D-A782-0919286F9FD3}" dt="2024-03-04T16:20:56.509" v="12"/>
-      <pc:docMkLst>
-        <pc:docMk/>
-      </pc:docMkLst>
-      <pc:sldChg chg="modSp new mod">
-        <pc:chgData name="Gabriel Silva dos Anjos" userId="8fb4646b515390da" providerId="LiveId" clId="{F65CE0AE-0A99-418D-A782-0919286F9FD3}" dt="2024-03-04T16:20:56.509" v="12"/>
-        <pc:sldMkLst>
-          <pc:docMk/>
-          <pc:sldMk cId="467503195" sldId="304"/>
-        </pc:sldMkLst>
-        <pc:spChg chg="mod">
-          <ac:chgData name="Gabriel Silva dos Anjos" userId="8fb4646b515390da" providerId="LiveId" clId="{F65CE0AE-0A99-418D-A782-0919286F9FD3}" dt="2024-03-04T16:20:36.079" v="6" actId="20577"/>
-          <ac:spMkLst>
-            <pc:docMk/>
-            <pc:sldMk cId="467503195" sldId="304"/>
-            <ac:spMk id="2" creationId="{385F0EBD-BAC1-7F3E-C62A-A00A7D1C81D6}"/>
-          </ac:spMkLst>
-        </pc:spChg>
-        <pc:spChg chg="mod">
-          <ac:chgData name="Gabriel Silva dos Anjos" userId="8fb4646b515390da" providerId="LiveId" clId="{F65CE0AE-0A99-418D-A782-0919286F9FD3}" dt="2024-03-04T16:20:56.509" v="12"/>
-          <ac:spMkLst>
-            <pc:docMk/>
-            <pc:sldMk cId="467503195" sldId="304"/>
-            <ac:spMk id="3" creationId="{1BB6A28E-BBEB-E646-89FE-C4D4D7D76485}"/>
-          </ac:spMkLst>
-        </pc:spChg>
-      </pc:sldChg>
-    </pc:docChg>
-  </pc:docChgLst>
-  <pc:docChgLst>
-    <pc:chgData name="Gabriel Silva dos Anjos" userId="8fb4646b515390da" providerId="LiveId" clId="{9DC39C1C-1C16-4384-A367-19A04739DB70}"/>
-    <pc:docChg chg="custSel addSld delSld modSld sldOrd">
-      <pc:chgData name="Gabriel Silva dos Anjos" userId="8fb4646b515390da" providerId="LiveId" clId="{9DC39C1C-1C16-4384-A367-19A04739DB70}" dt="2024-03-04T22:34:02.511" v="952" actId="20577"/>
-      <pc:docMkLst>
-        <pc:docMk/>
-      </pc:docMkLst>
-      <pc:sldChg chg="del">
-        <pc:chgData name="Gabriel Silva dos Anjos" userId="8fb4646b515390da" providerId="LiveId" clId="{9DC39C1C-1C16-4384-A367-19A04739DB70}" dt="2024-03-04T16:30:19.868" v="249" actId="47"/>
-        <pc:sldMkLst>
-          <pc:docMk/>
-          <pc:sldMk cId="2410583972" sldId="273"/>
-        </pc:sldMkLst>
-      </pc:sldChg>
-      <pc:sldChg chg="modSp mod ord">
-        <pc:chgData name="Gabriel Silva dos Anjos" userId="8fb4646b515390da" providerId="LiveId" clId="{9DC39C1C-1C16-4384-A367-19A04739DB70}" dt="2024-03-04T16:31:37.961" v="273"/>
-        <pc:sldMkLst>
-          <pc:docMk/>
-          <pc:sldMk cId="2568185871" sldId="274"/>
-        </pc:sldMkLst>
-        <pc:spChg chg="mod">
-          <ac:chgData name="Gabriel Silva dos Anjos" userId="8fb4646b515390da" providerId="LiveId" clId="{9DC39C1C-1C16-4384-A367-19A04739DB70}" dt="2024-03-04T16:30:50.301" v="267" actId="20577"/>
-          <ac:spMkLst>
-            <pc:docMk/>
-            <pc:sldMk cId="2568185871" sldId="274"/>
-            <ac:spMk id="4" creationId="{07A62C7F-D867-616C-099A-E69DE23B9DA6}"/>
-          </ac:spMkLst>
-        </pc:spChg>
-      </pc:sldChg>
-      <pc:sldChg chg="modSp mod">
-        <pc:chgData name="Gabriel Silva dos Anjos" userId="8fb4646b515390da" providerId="LiveId" clId="{9DC39C1C-1C16-4384-A367-19A04739DB70}" dt="2024-03-04T20:37:16.731" v="928" actId="313"/>
-        <pc:sldMkLst>
-          <pc:docMk/>
-          <pc:sldMk cId="4230727323" sldId="277"/>
-        </pc:sldMkLst>
-        <pc:spChg chg="mod">
-          <ac:chgData name="Gabriel Silva dos Anjos" userId="8fb4646b515390da" providerId="LiveId" clId="{9DC39C1C-1C16-4384-A367-19A04739DB70}" dt="2024-03-04T20:37:16.731" v="928" actId="313"/>
-          <ac:spMkLst>
-            <pc:docMk/>
-            <pc:sldMk cId="4230727323" sldId="277"/>
-            <ac:spMk id="3" creationId="{17238216-AE11-86ED-7221-61C98D4FD80B}"/>
-          </ac:spMkLst>
-        </pc:spChg>
-      </pc:sldChg>
-      <pc:sldChg chg="modSp mod ord">
-        <pc:chgData name="Gabriel Silva dos Anjos" userId="8fb4646b515390da" providerId="LiveId" clId="{9DC39C1C-1C16-4384-A367-19A04739DB70}" dt="2024-03-04T16:31:37.961" v="273"/>
-        <pc:sldMkLst>
-          <pc:docMk/>
-          <pc:sldMk cId="1164941885" sldId="278"/>
-        </pc:sldMkLst>
-        <pc:spChg chg="mod">
-          <ac:chgData name="Gabriel Silva dos Anjos" userId="8fb4646b515390da" providerId="LiveId" clId="{9DC39C1C-1C16-4384-A367-19A04739DB70}" dt="2024-03-04T16:31:13.604" v="271" actId="2711"/>
-          <ac:spMkLst>
-            <pc:docMk/>
-            <pc:sldMk cId="1164941885" sldId="278"/>
-            <ac:spMk id="4" creationId="{5139B1A6-D609-C3D9-B1F4-D69EDA48DB99}"/>
-          </ac:spMkLst>
-        </pc:spChg>
-      </pc:sldChg>
-      <pc:sldChg chg="del ord">
-        <pc:chgData name="Gabriel Silva dos Anjos" userId="8fb4646b515390da" providerId="LiveId" clId="{9DC39C1C-1C16-4384-A367-19A04739DB70}" dt="2024-03-04T16:40:52.177" v="338" actId="47"/>
-        <pc:sldMkLst>
-          <pc:docMk/>
-          <pc:sldMk cId="2843998053" sldId="280"/>
-        </pc:sldMkLst>
-      </pc:sldChg>
-      <pc:sldChg chg="delSp modSp mod ord delAnim">
-        <pc:chgData name="Gabriel Silva dos Anjos" userId="8fb4646b515390da" providerId="LiveId" clId="{9DC39C1C-1C16-4384-A367-19A04739DB70}" dt="2024-03-04T16:47:27.230" v="674"/>
-        <pc:sldMkLst>
-          <pc:docMk/>
-          <pc:sldMk cId="2583751628" sldId="282"/>
-        </pc:sldMkLst>
-        <pc:spChg chg="mod">
-          <ac:chgData name="Gabriel Silva dos Anjos" userId="8fb4646b515390da" providerId="LiveId" clId="{9DC39C1C-1C16-4384-A367-19A04739DB70}" dt="2024-03-04T16:47:01.564" v="671" actId="404"/>
-          <ac:spMkLst>
-            <pc:docMk/>
-            <pc:sldMk cId="2583751628" sldId="282"/>
-            <ac:spMk id="4" creationId="{14D0271C-F665-F9D4-CA05-68CF430CDB45}"/>
-          </ac:spMkLst>
-        </pc:spChg>
-        <pc:spChg chg="mod">
-          <ac:chgData name="Gabriel Silva dos Anjos" userId="8fb4646b515390da" providerId="LiveId" clId="{9DC39C1C-1C16-4384-A367-19A04739DB70}" dt="2024-03-04T16:47:19.741" v="672" actId="207"/>
-          <ac:spMkLst>
-            <pc:docMk/>
-            <pc:sldMk cId="2583751628" sldId="282"/>
-            <ac:spMk id="5" creationId="{67F251DA-7C30-3815-4682-BAE50B1C153C}"/>
-          </ac:spMkLst>
-        </pc:spChg>
-        <pc:spChg chg="del mod">
-          <ac:chgData name="Gabriel Silva dos Anjos" userId="8fb4646b515390da" providerId="LiveId" clId="{9DC39C1C-1C16-4384-A367-19A04739DB70}" dt="2024-03-04T16:45:48.777" v="604" actId="478"/>
-          <ac:spMkLst>
-            <pc:docMk/>
-            <pc:sldMk cId="2583751628" sldId="282"/>
-            <ac:spMk id="8" creationId="{A49299F5-3971-1912-0044-052DC3A2732D}"/>
-          </ac:spMkLst>
-        </pc:spChg>
-      </pc:sldChg>
-      <pc:sldChg chg="modSp">
-        <pc:chgData name="Gabriel Silva dos Anjos" userId="8fb4646b515390da" providerId="LiveId" clId="{9DC39C1C-1C16-4384-A367-19A04739DB70}" dt="2024-03-04T22:34:02.511" v="952" actId="20577"/>
-        <pc:sldMkLst>
-          <pc:docMk/>
-          <pc:sldMk cId="743478797" sldId="286"/>
-        </pc:sldMkLst>
-        <pc:spChg chg="mod">
-          <ac:chgData name="Gabriel Silva dos Anjos" userId="8fb4646b515390da" providerId="LiveId" clId="{9DC39C1C-1C16-4384-A367-19A04739DB70}" dt="2024-03-04T22:34:02.511" v="952" actId="20577"/>
-          <ac:spMkLst>
-            <pc:docMk/>
-            <pc:sldMk cId="743478797" sldId="286"/>
-            <ac:spMk id="8" creationId="{7FC842EB-A125-8217-1789-FCDA976821E4}"/>
-          </ac:spMkLst>
-        </pc:spChg>
-      </pc:sldChg>
-      <pc:sldChg chg="del">
-        <pc:chgData name="Gabriel Silva dos Anjos" userId="8fb4646b515390da" providerId="LiveId" clId="{9DC39C1C-1C16-4384-A367-19A04739DB70}" dt="2024-03-04T20:27:27.248" v="817" actId="47"/>
-        <pc:sldMkLst>
-          <pc:docMk/>
-          <pc:sldMk cId="3836642133" sldId="288"/>
-        </pc:sldMkLst>
-      </pc:sldChg>
-      <pc:sldChg chg="modSp del mod ord">
-        <pc:chgData name="Gabriel Silva dos Anjos" userId="8fb4646b515390da" providerId="LiveId" clId="{9DC39C1C-1C16-4384-A367-19A04739DB70}" dt="2024-03-04T20:28:17.030" v="821" actId="47"/>
-        <pc:sldMkLst>
-          <pc:docMk/>
-          <pc:sldMk cId="3724892587" sldId="290"/>
-        </pc:sldMkLst>
-        <pc:spChg chg="mod">
-          <ac:chgData name="Gabriel Silva dos Anjos" userId="8fb4646b515390da" providerId="LiveId" clId="{9DC39C1C-1C16-4384-A367-19A04739DB70}" dt="2024-03-04T20:27:51.670" v="820"/>
-          <ac:spMkLst>
-            <pc:docMk/>
-            <pc:sldMk cId="3724892587" sldId="290"/>
-            <ac:spMk id="2" creationId="{64EB498B-39E8-3094-6F1F-C6298CA67352}"/>
-          </ac:spMkLst>
-        </pc:spChg>
-      </pc:sldChg>
-      <pc:sldChg chg="delSp modAnim">
-        <pc:chgData name="Gabriel Silva dos Anjos" userId="8fb4646b515390da" providerId="LiveId" clId="{9DC39C1C-1C16-4384-A367-19A04739DB70}" dt="2024-03-04T20:40:43.054" v="929" actId="21"/>
-        <pc:sldMkLst>
-          <pc:docMk/>
-          <pc:sldMk cId="1084016887" sldId="291"/>
-        </pc:sldMkLst>
-        <pc:picChg chg="del">
-          <ac:chgData name="Gabriel Silva dos Anjos" userId="8fb4646b515390da" providerId="LiveId" clId="{9DC39C1C-1C16-4384-A367-19A04739DB70}" dt="2024-03-04T20:40:43.054" v="929" actId="21"/>
-          <ac:picMkLst>
-            <pc:docMk/>
-            <pc:sldMk cId="1084016887" sldId="291"/>
-            <ac:picMk id="7" creationId="{12A345D5-7629-9263-4698-9C93B08D56DA}"/>
-          </ac:picMkLst>
-        </pc:picChg>
-      </pc:sldChg>
-      <pc:sldChg chg="modSp">
-        <pc:chgData name="Gabriel Silva dos Anjos" userId="8fb4646b515390da" providerId="LiveId" clId="{9DC39C1C-1C16-4384-A367-19A04739DB70}" dt="2024-03-04T20:41:31.922" v="930" actId="1076"/>
-        <pc:sldMkLst>
-          <pc:docMk/>
-          <pc:sldMk cId="1926013168" sldId="295"/>
-        </pc:sldMkLst>
-        <pc:picChg chg="mod">
-          <ac:chgData name="Gabriel Silva dos Anjos" userId="8fb4646b515390da" providerId="LiveId" clId="{9DC39C1C-1C16-4384-A367-19A04739DB70}" dt="2024-03-04T20:41:31.922" v="930" actId="1076"/>
-          <ac:picMkLst>
-            <pc:docMk/>
-            <pc:sldMk cId="1926013168" sldId="295"/>
-            <ac:picMk id="4" creationId="{132E6132-4C57-719E-0115-FB836E1D63EC}"/>
-          </ac:picMkLst>
-        </pc:picChg>
-      </pc:sldChg>
-      <pc:sldChg chg="modSp mod">
-        <pc:chgData name="Gabriel Silva dos Anjos" userId="8fb4646b515390da" providerId="LiveId" clId="{9DC39C1C-1C16-4384-A367-19A04739DB70}" dt="2024-03-04T21:18:30.681" v="941" actId="20577"/>
-        <pc:sldMkLst>
-          <pc:docMk/>
-          <pc:sldMk cId="2009108260" sldId="298"/>
-        </pc:sldMkLst>
-        <pc:graphicFrameChg chg="modGraphic">
-          <ac:chgData name="Gabriel Silva dos Anjos" userId="8fb4646b515390da" providerId="LiveId" clId="{9DC39C1C-1C16-4384-A367-19A04739DB70}" dt="2024-03-04T21:18:30.681" v="941" actId="20577"/>
-          <ac:graphicFrameMkLst>
-            <pc:docMk/>
-            <pc:sldMk cId="2009108260" sldId="298"/>
-            <ac:graphicFrameMk id="9" creationId="{035A5F18-6AC6-0476-A69A-4269A2327464}"/>
-          </ac:graphicFrameMkLst>
-        </pc:graphicFrameChg>
-      </pc:sldChg>
-      <pc:sldChg chg="ord">
-        <pc:chgData name="Gabriel Silva dos Anjos" userId="8fb4646b515390da" providerId="LiveId" clId="{9DC39C1C-1C16-4384-A367-19A04739DB70}" dt="2024-03-04T16:31:41.678" v="275"/>
-        <pc:sldMkLst>
-          <pc:docMk/>
-          <pc:sldMk cId="2847918905" sldId="302"/>
-        </pc:sldMkLst>
-      </pc:sldChg>
-      <pc:sldChg chg="addSp delSp modSp mod ord">
-        <pc:chgData name="Gabriel Silva dos Anjos" userId="8fb4646b515390da" providerId="LiveId" clId="{9DC39C1C-1C16-4384-A367-19A04739DB70}" dt="2024-03-04T20:33:18.479" v="853" actId="20577"/>
-        <pc:sldMkLst>
-          <pc:docMk/>
-          <pc:sldMk cId="1172665844" sldId="303"/>
-        </pc:sldMkLst>
-        <pc:spChg chg="add del mod">
-          <ac:chgData name="Gabriel Silva dos Anjos" userId="8fb4646b515390da" providerId="LiveId" clId="{9DC39C1C-1C16-4384-A367-19A04739DB70}" dt="2024-03-04T20:32:24.699" v="835" actId="22"/>
-          <ac:spMkLst>
-            <pc:docMk/>
-            <pc:sldMk cId="1172665844" sldId="303"/>
-            <ac:spMk id="4" creationId="{F93FEEA2-FD1B-26D7-099C-DBA97A083E67}"/>
-          </ac:spMkLst>
-        </pc:spChg>
-        <pc:spChg chg="mod ord">
-          <ac:chgData name="Gabriel Silva dos Anjos" userId="8fb4646b515390da" providerId="LiveId" clId="{9DC39C1C-1C16-4384-A367-19A04739DB70}" dt="2024-03-04T20:32:56.826" v="843" actId="1076"/>
-          <ac:spMkLst>
-            <pc:docMk/>
-            <pc:sldMk cId="1172665844" sldId="303"/>
-            <ac:spMk id="7" creationId="{866930D0-7A84-2B13-757E-818904B18FD2}"/>
-          </ac:spMkLst>
-        </pc:spChg>
-        <pc:graphicFrameChg chg="mod modGraphic">
-          <ac:chgData name="Gabriel Silva dos Anjos" userId="8fb4646b515390da" providerId="LiveId" clId="{9DC39C1C-1C16-4384-A367-19A04739DB70}" dt="2024-03-04T20:33:18.479" v="853" actId="20577"/>
-          <ac:graphicFrameMkLst>
-            <pc:docMk/>
-            <pc:sldMk cId="1172665844" sldId="303"/>
-            <ac:graphicFrameMk id="6" creationId="{8A2216A1-7604-7A5A-8642-4F58ED9CE8D0}"/>
-          </ac:graphicFrameMkLst>
-        </pc:graphicFrameChg>
-        <pc:picChg chg="del">
-          <ac:chgData name="Gabriel Silva dos Anjos" userId="8fb4646b515390da" providerId="LiveId" clId="{9DC39C1C-1C16-4384-A367-19A04739DB70}" dt="2024-03-04T20:32:23.554" v="834" actId="478"/>
-          <ac:picMkLst>
-            <pc:docMk/>
-            <pc:sldMk cId="1172665844" sldId="303"/>
-            <ac:picMk id="5" creationId="{BC090374-9A08-AEA3-A7A7-0145072A1388}"/>
-          </ac:picMkLst>
-        </pc:picChg>
-        <pc:picChg chg="add mod ord">
-          <ac:chgData name="Gabriel Silva dos Anjos" userId="8fb4646b515390da" providerId="LiveId" clId="{9DC39C1C-1C16-4384-A367-19A04739DB70}" dt="2024-03-04T20:32:37.675" v="840" actId="1076"/>
-          <ac:picMkLst>
-            <pc:docMk/>
-            <pc:sldMk cId="1172665844" sldId="303"/>
-            <ac:picMk id="9" creationId="{0FA190D8-2FD2-B80E-49F9-50C74BA57797}"/>
-          </ac:picMkLst>
-        </pc:picChg>
-      </pc:sldChg>
-      <pc:sldChg chg="modSp mod">
-        <pc:chgData name="Gabriel Silva dos Anjos" userId="8fb4646b515390da" providerId="LiveId" clId="{9DC39C1C-1C16-4384-A367-19A04739DB70}" dt="2024-03-04T20:29:28.648" v="823"/>
-        <pc:sldMkLst>
-          <pc:docMk/>
-          <pc:sldMk cId="467503195" sldId="304"/>
-        </pc:sldMkLst>
-        <pc:spChg chg="mod">
-          <ac:chgData name="Gabriel Silva dos Anjos" userId="8fb4646b515390da" providerId="LiveId" clId="{9DC39C1C-1C16-4384-A367-19A04739DB70}" dt="2024-03-04T20:29:28.648" v="823"/>
-          <ac:spMkLst>
-            <pc:docMk/>
-            <pc:sldMk cId="467503195" sldId="304"/>
-            <ac:spMk id="3" creationId="{1BB6A28E-BBEB-E646-89FE-C4D4D7D76485}"/>
-          </ac:spMkLst>
-        </pc:spChg>
-      </pc:sldChg>
-      <pc:sldChg chg="addSp delSp modSp new mod ord">
-        <pc:chgData name="Gabriel Silva dos Anjos" userId="8fb4646b515390da" providerId="LiveId" clId="{9DC39C1C-1C16-4384-A367-19A04739DB70}" dt="2024-03-04T20:21:02.050" v="696" actId="1076"/>
-        <pc:sldMkLst>
-          <pc:docMk/>
-          <pc:sldMk cId="660501365" sldId="305"/>
-        </pc:sldMkLst>
-        <pc:spChg chg="mod">
-          <ac:chgData name="Gabriel Silva dos Anjos" userId="8fb4646b515390da" providerId="LiveId" clId="{9DC39C1C-1C16-4384-A367-19A04739DB70}" dt="2024-03-04T16:39:17.847" v="330" actId="20577"/>
-          <ac:spMkLst>
-            <pc:docMk/>
-            <pc:sldMk cId="660501365" sldId="305"/>
-            <ac:spMk id="2" creationId="{FD0BFA52-27C4-EB4A-9FCE-1DD39BD14C58}"/>
-          </ac:spMkLst>
-        </pc:spChg>
-        <pc:spChg chg="del">
-          <ac:chgData name="Gabriel Silva dos Anjos" userId="8fb4646b515390da" providerId="LiveId" clId="{9DC39C1C-1C16-4384-A367-19A04739DB70}" dt="2024-03-04T16:24:21.566" v="3"/>
-          <ac:spMkLst>
-            <pc:docMk/>
-            <pc:sldMk cId="660501365" sldId="305"/>
-            <ac:spMk id="3" creationId="{75BF3BB5-C4B7-B4FE-2A5F-7FB3307D4D1D}"/>
-          </ac:spMkLst>
-        </pc:spChg>
-        <pc:spChg chg="add del mod">
-          <ac:chgData name="Gabriel Silva dos Anjos" userId="8fb4646b515390da" providerId="LiveId" clId="{9DC39C1C-1C16-4384-A367-19A04739DB70}" dt="2024-03-04T16:34:37.769" v="298" actId="478"/>
-          <ac:spMkLst>
-            <pc:docMk/>
-            <pc:sldMk cId="660501365" sldId="305"/>
-            <ac:spMk id="4" creationId="{8BDCE265-AE78-2DCD-EB43-E8846ABC6982}"/>
-          </ac:spMkLst>
-        </pc:spChg>
-        <pc:spChg chg="add del mod">
-          <ac:chgData name="Gabriel Silva dos Anjos" userId="8fb4646b515390da" providerId="LiveId" clId="{9DC39C1C-1C16-4384-A367-19A04739DB70}" dt="2024-03-04T16:37:42.546" v="302"/>
-          <ac:spMkLst>
-            <pc:docMk/>
-            <pc:sldMk cId="660501365" sldId="305"/>
-            <ac:spMk id="5" creationId="{FD73C607-2CCA-542B-B3A7-2D0D2CAE1895}"/>
-          </ac:spMkLst>
-        </pc:spChg>
-        <pc:picChg chg="add del mod">
-          <ac:chgData name="Gabriel Silva dos Anjos" userId="8fb4646b515390da" providerId="LiveId" clId="{9DC39C1C-1C16-4384-A367-19A04739DB70}" dt="2024-03-04T16:37:40.734" v="301" actId="478"/>
-          <ac:picMkLst>
-            <pc:docMk/>
-            <pc:sldMk cId="660501365" sldId="305"/>
-            <ac:picMk id="1026" creationId="{E02A8358-0069-0F61-6758-7B5D774CA092}"/>
-          </ac:picMkLst>
-        </pc:picChg>
-        <pc:picChg chg="add del">
-          <ac:chgData name="Gabriel Silva dos Anjos" userId="8fb4646b515390da" providerId="LiveId" clId="{9DC39C1C-1C16-4384-A367-19A04739DB70}" dt="2024-03-04T16:34:44.693" v="300" actId="478"/>
-          <ac:picMkLst>
-            <pc:docMk/>
-            <pc:sldMk cId="660501365" sldId="305"/>
-            <ac:picMk id="1028" creationId="{4AF3FD2E-6A4F-06D4-303A-5C90B6B93CF5}"/>
-          </ac:picMkLst>
-        </pc:picChg>
-        <pc:picChg chg="add mod">
-          <ac:chgData name="Gabriel Silva dos Anjos" userId="8fb4646b515390da" providerId="LiveId" clId="{9DC39C1C-1C16-4384-A367-19A04739DB70}" dt="2024-03-04T20:21:02.050" v="696" actId="1076"/>
-          <ac:picMkLst>
-            <pc:docMk/>
-            <pc:sldMk cId="660501365" sldId="305"/>
-            <ac:picMk id="1030" creationId="{3CCF8880-0B11-1666-99BC-9B7866E35F5B}"/>
-          </ac:picMkLst>
-        </pc:picChg>
-      </pc:sldChg>
-      <pc:sldChg chg="addSp delSp modSp new del">
-        <pc:chgData name="Gabriel Silva dos Anjos" userId="8fb4646b515390da" providerId="LiveId" clId="{9DC39C1C-1C16-4384-A367-19A04739DB70}" dt="2024-03-04T16:40:13.839" v="337" actId="47"/>
-        <pc:sldMkLst>
-          <pc:docMk/>
-          <pc:sldMk cId="358869596" sldId="306"/>
-        </pc:sldMkLst>
-        <pc:spChg chg="del">
-          <ac:chgData name="Gabriel Silva dos Anjos" userId="8fb4646b515390da" providerId="LiveId" clId="{9DC39C1C-1C16-4384-A367-19A04739DB70}" dt="2024-03-04T16:27:54.632" v="198"/>
-          <ac:spMkLst>
-            <pc:docMk/>
-            <pc:sldMk cId="358869596" sldId="306"/>
-            <ac:spMk id="3" creationId="{208CA9D9-48EB-73B8-4E7C-AE20ECAF4FAA}"/>
-          </ac:spMkLst>
-        </pc:spChg>
-        <pc:spChg chg="add mod">
-          <ac:chgData name="Gabriel Silva dos Anjos" userId="8fb4646b515390da" providerId="LiveId" clId="{9DC39C1C-1C16-4384-A367-19A04739DB70}" dt="2024-03-04T16:29:28.888" v="205" actId="21"/>
-          <ac:spMkLst>
-            <pc:docMk/>
-            <pc:sldMk cId="358869596" sldId="306"/>
-            <ac:spMk id="4" creationId="{A0BBC7EA-3E1B-ABD5-CD03-00F82B8864F2}"/>
-          </ac:spMkLst>
-        </pc:spChg>
-        <pc:picChg chg="add">
-          <ac:chgData name="Gabriel Silva dos Anjos" userId="8fb4646b515390da" providerId="LiveId" clId="{9DC39C1C-1C16-4384-A367-19A04739DB70}" dt="2024-03-04T16:27:52.407" v="197"/>
-          <ac:picMkLst>
-            <pc:docMk/>
-            <pc:sldMk cId="358869596" sldId="306"/>
-            <ac:picMk id="2050" creationId="{FBFBA929-54CC-7027-0207-0CE74DF41181}"/>
-          </ac:picMkLst>
-        </pc:picChg>
-        <pc:picChg chg="add del mod">
-          <ac:chgData name="Gabriel Silva dos Anjos" userId="8fb4646b515390da" providerId="LiveId" clId="{9DC39C1C-1C16-4384-A367-19A04739DB70}" dt="2024-03-04T16:29:28.888" v="205" actId="21"/>
-          <ac:picMkLst>
-            <pc:docMk/>
-            <pc:sldMk cId="358869596" sldId="306"/>
-            <ac:picMk id="2052" creationId="{18ACE99E-247F-EE5E-64DA-6973C5D66B28}"/>
-          </ac:picMkLst>
-        </pc:picChg>
-      </pc:sldChg>
-      <pc:sldChg chg="addSp delSp modSp new del mod">
-        <pc:chgData name="Gabriel Silva dos Anjos" userId="8fb4646b515390da" providerId="LiveId" clId="{9DC39C1C-1C16-4384-A367-19A04739DB70}" dt="2024-03-04T20:26:46.208" v="816" actId="47"/>
-        <pc:sldMkLst>
-          <pc:docMk/>
-          <pc:sldMk cId="3069295521" sldId="307"/>
-        </pc:sldMkLst>
-        <pc:spChg chg="del">
-          <ac:chgData name="Gabriel Silva dos Anjos" userId="8fb4646b515390da" providerId="LiveId" clId="{9DC39C1C-1C16-4384-A367-19A04739DB70}" dt="2024-03-04T16:32:09.491" v="279" actId="478"/>
-          <ac:spMkLst>
-            <pc:docMk/>
-            <pc:sldMk cId="3069295521" sldId="307"/>
-            <ac:spMk id="2" creationId="{3BEA9100-7A5E-C759-5B8E-99F63EB2B572}"/>
-          </ac:spMkLst>
-        </pc:spChg>
-        <pc:spChg chg="del">
-          <ac:chgData name="Gabriel Silva dos Anjos" userId="8fb4646b515390da" providerId="LiveId" clId="{9DC39C1C-1C16-4384-A367-19A04739DB70}" dt="2024-03-04T16:28:25.526" v="204"/>
-          <ac:spMkLst>
-            <pc:docMk/>
-            <pc:sldMk cId="3069295521" sldId="307"/>
-            <ac:spMk id="3" creationId="{DED32909-F1E1-2E7E-2080-17359F22E977}"/>
-          </ac:spMkLst>
-        </pc:spChg>
-        <pc:spChg chg="add del mod">
-          <ac:chgData name="Gabriel Silva dos Anjos" userId="8fb4646b515390da" providerId="LiveId" clId="{9DC39C1C-1C16-4384-A367-19A04739DB70}" dt="2024-03-04T16:32:37.796" v="294" actId="478"/>
-          <ac:spMkLst>
-            <pc:docMk/>
-            <pc:sldMk cId="3069295521" sldId="307"/>
-            <ac:spMk id="4" creationId="{F32C6C5B-C331-8911-0178-3014DA28330E}"/>
-          </ac:spMkLst>
-        </pc:spChg>
-        <pc:picChg chg="add">
-          <ac:chgData name="Gabriel Silva dos Anjos" userId="8fb4646b515390da" providerId="LiveId" clId="{9DC39C1C-1C16-4384-A367-19A04739DB70}" dt="2024-03-04T16:28:21.318" v="203"/>
-          <ac:picMkLst>
-            <pc:docMk/>
-            <pc:sldMk cId="3069295521" sldId="307"/>
-            <ac:picMk id="3074" creationId="{26825D71-9F2F-8620-CEA9-4317F5249FC0}"/>
-          </ac:picMkLst>
-        </pc:picChg>
-        <pc:picChg chg="add mod">
-          <ac:chgData name="Gabriel Silva dos Anjos" userId="8fb4646b515390da" providerId="LiveId" clId="{9DC39C1C-1C16-4384-A367-19A04739DB70}" dt="2024-03-04T16:32:57.426" v="297" actId="1076"/>
-          <ac:picMkLst>
-            <pc:docMk/>
-            <pc:sldMk cId="3069295521" sldId="307"/>
-            <ac:picMk id="3076" creationId="{E4B53E0D-8741-5A98-2007-8228796F2FD9}"/>
-          </ac:picMkLst>
-        </pc:picChg>
-      </pc:sldChg>
-      <pc:sldChg chg="addSp delSp modSp new mod">
-        <pc:chgData name="Gabriel Silva dos Anjos" userId="8fb4646b515390da" providerId="LiveId" clId="{9DC39C1C-1C16-4384-A367-19A04739DB70}" dt="2024-03-04T16:29:56.581" v="248" actId="20577"/>
-        <pc:sldMkLst>
-          <pc:docMk/>
-          <pc:sldMk cId="349593718" sldId="308"/>
-        </pc:sldMkLst>
-        <pc:spChg chg="mod">
-          <ac:chgData name="Gabriel Silva dos Anjos" userId="8fb4646b515390da" providerId="LiveId" clId="{9DC39C1C-1C16-4384-A367-19A04739DB70}" dt="2024-03-04T16:29:56.581" v="248" actId="20577"/>
-          <ac:spMkLst>
-            <pc:docMk/>
-            <pc:sldMk cId="349593718" sldId="308"/>
-            <ac:spMk id="2" creationId="{D216C3A2-7D9C-D2BC-4A5C-AF2D9EB3C020}"/>
-          </ac:spMkLst>
-        </pc:spChg>
-        <pc:spChg chg="del">
-          <ac:chgData name="Gabriel Silva dos Anjos" userId="8fb4646b515390da" providerId="LiveId" clId="{9DC39C1C-1C16-4384-A367-19A04739DB70}" dt="2024-03-04T16:29:35.736" v="207"/>
-          <ac:spMkLst>
-            <pc:docMk/>
-            <pc:sldMk cId="349593718" sldId="308"/>
-            <ac:spMk id="3" creationId="{F3A1FB53-A9DD-A17C-BFED-5BD74B380162}"/>
-          </ac:spMkLst>
-        </pc:spChg>
-        <pc:picChg chg="add mod">
-          <ac:chgData name="Gabriel Silva dos Anjos" userId="8fb4646b515390da" providerId="LiveId" clId="{9DC39C1C-1C16-4384-A367-19A04739DB70}" dt="2024-03-04T16:29:42.986" v="210" actId="1076"/>
-          <ac:picMkLst>
-            <pc:docMk/>
-            <pc:sldMk cId="349593718" sldId="308"/>
-            <ac:picMk id="2052" creationId="{18ACE99E-247F-EE5E-64DA-6973C5D66B28}"/>
-          </ac:picMkLst>
-        </pc:picChg>
-      </pc:sldChg>
-      <pc:sldChg chg="addSp delSp modSp add mod ord delAnim">
-        <pc:chgData name="Gabriel Silva dos Anjos" userId="8fb4646b515390da" providerId="LiveId" clId="{9DC39C1C-1C16-4384-A367-19A04739DB70}" dt="2024-03-04T16:48:38.018" v="689" actId="478"/>
-        <pc:sldMkLst>
-          <pc:docMk/>
-          <pc:sldMk cId="2296260946" sldId="309"/>
-        </pc:sldMkLst>
-        <pc:spChg chg="mod">
-          <ac:chgData name="Gabriel Silva dos Anjos" userId="8fb4646b515390da" providerId="LiveId" clId="{9DC39C1C-1C16-4384-A367-19A04739DB70}" dt="2024-03-04T16:47:44.370" v="677" actId="1076"/>
-          <ac:spMkLst>
-            <pc:docMk/>
-            <pc:sldMk cId="2296260946" sldId="309"/>
-            <ac:spMk id="2" creationId="{2729CF16-1851-2688-40F5-BFD8990BC9B1}"/>
-          </ac:spMkLst>
-        </pc:spChg>
-        <pc:spChg chg="mod">
-          <ac:chgData name="Gabriel Silva dos Anjos" userId="8fb4646b515390da" providerId="LiveId" clId="{9DC39C1C-1C16-4384-A367-19A04739DB70}" dt="2024-03-04T16:47:51.731" v="679" actId="1076"/>
-          <ac:spMkLst>
-            <pc:docMk/>
-            <pc:sldMk cId="2296260946" sldId="309"/>
-            <ac:spMk id="4" creationId="{96390124-64CD-7FD4-F979-35A5D2CA9611}"/>
-          </ac:spMkLst>
-        </pc:spChg>
-        <pc:spChg chg="mod">
-          <ac:chgData name="Gabriel Silva dos Anjos" userId="8fb4646b515390da" providerId="LiveId" clId="{9DC39C1C-1C16-4384-A367-19A04739DB70}" dt="2024-03-04T16:47:56.132" v="680" actId="1076"/>
-          <ac:spMkLst>
-            <pc:docMk/>
-            <pc:sldMk cId="2296260946" sldId="309"/>
-            <ac:spMk id="5" creationId="{FFAB0BB4-EFC7-21A1-DF31-5B79F1E58B3B}"/>
-          </ac:spMkLst>
-        </pc:spChg>
-        <pc:spChg chg="del">
-          <ac:chgData name="Gabriel Silva dos Anjos" userId="8fb4646b515390da" providerId="LiveId" clId="{9DC39C1C-1C16-4384-A367-19A04739DB70}" dt="2024-03-04T16:46:02.418" v="611" actId="478"/>
-          <ac:spMkLst>
-            <pc:docMk/>
-            <pc:sldMk cId="2296260946" sldId="309"/>
-            <ac:spMk id="8" creationId="{2DB0B4A0-C15D-7BC7-B01A-6A2868E9CC8B}"/>
-          </ac:spMkLst>
-        </pc:spChg>
-        <pc:picChg chg="add del mod">
-          <ac:chgData name="Gabriel Silva dos Anjos" userId="8fb4646b515390da" providerId="LiveId" clId="{9DC39C1C-1C16-4384-A367-19A04739DB70}" dt="2024-03-04T16:48:38.018" v="689" actId="478"/>
-          <ac:picMkLst>
-            <pc:docMk/>
-            <pc:sldMk cId="2296260946" sldId="309"/>
-            <ac:picMk id="3" creationId="{C45DD9A4-A0C3-6435-7336-2B828BF9B6A5}"/>
-          </ac:picMkLst>
-        </pc:picChg>
-        <pc:picChg chg="mod">
-          <ac:chgData name="Gabriel Silva dos Anjos" userId="8fb4646b515390da" providerId="LiveId" clId="{9DC39C1C-1C16-4384-A367-19A04739DB70}" dt="2024-03-04T16:47:48.530" v="678" actId="1076"/>
-          <ac:picMkLst>
-            <pc:docMk/>
-            <pc:sldMk cId="2296260946" sldId="309"/>
-            <ac:picMk id="1026" creationId="{BCDE14E0-97A8-771A-F24F-F9E64B299788}"/>
-          </ac:picMkLst>
-        </pc:picChg>
-      </pc:sldChg>
-      <pc:sldChg chg="addSp delSp modSp add mod">
-        <pc:chgData name="Gabriel Silva dos Anjos" userId="8fb4646b515390da" providerId="LiveId" clId="{9DC39C1C-1C16-4384-A367-19A04739DB70}" dt="2024-03-04T20:21:06.730" v="698" actId="1076"/>
-        <pc:sldMkLst>
-          <pc:docMk/>
-          <pc:sldMk cId="1768758862" sldId="310"/>
-        </pc:sldMkLst>
-        <pc:spChg chg="mod">
-          <ac:chgData name="Gabriel Silva dos Anjos" userId="8fb4646b515390da" providerId="LiveId" clId="{9DC39C1C-1C16-4384-A367-19A04739DB70}" dt="2024-03-04T16:42:54.756" v="417" actId="20577"/>
-          <ac:spMkLst>
-            <pc:docMk/>
-            <pc:sldMk cId="1768758862" sldId="310"/>
-            <ac:spMk id="2" creationId="{92D0A82E-079D-90F3-3493-1C3F1BEBBF24}"/>
-          </ac:spMkLst>
-        </pc:spChg>
-        <pc:spChg chg="add del mod">
-          <ac:chgData name="Gabriel Silva dos Anjos" userId="8fb4646b515390da" providerId="LiveId" clId="{9DC39C1C-1C16-4384-A367-19A04739DB70}" dt="2024-03-04T16:43:11.381" v="420"/>
-          <ac:spMkLst>
-            <pc:docMk/>
-            <pc:sldMk cId="1768758862" sldId="310"/>
-            <ac:spMk id="3" creationId="{C30B1781-9602-C7B9-2DDA-732BC235AC96}"/>
-          </ac:spMkLst>
-        </pc:spChg>
-        <pc:picChg chg="del mod">
-          <ac:chgData name="Gabriel Silva dos Anjos" userId="8fb4646b515390da" providerId="LiveId" clId="{9DC39C1C-1C16-4384-A367-19A04739DB70}" dt="2024-03-04T16:43:10.046" v="419" actId="478"/>
-          <ac:picMkLst>
-            <pc:docMk/>
-            <pc:sldMk cId="1768758862" sldId="310"/>
-            <ac:picMk id="1030" creationId="{D0600EBA-583F-3F38-9787-CCF1D2B6F875}"/>
-          </ac:picMkLst>
-        </pc:picChg>
-        <pc:picChg chg="add">
-          <ac:chgData name="Gabriel Silva dos Anjos" userId="8fb4646b515390da" providerId="LiveId" clId="{9DC39C1C-1C16-4384-A367-19A04739DB70}" dt="2024-03-04T16:43:01.194" v="418"/>
-          <ac:picMkLst>
-            <pc:docMk/>
-            <pc:sldMk cId="1768758862" sldId="310"/>
-            <ac:picMk id="5122" creationId="{EC8E652B-0D88-A3D1-0F2D-B787FB6FD96A}"/>
-          </ac:picMkLst>
-        </pc:picChg>
-        <pc:picChg chg="add mod">
-          <ac:chgData name="Gabriel Silva dos Anjos" userId="8fb4646b515390da" providerId="LiveId" clId="{9DC39C1C-1C16-4384-A367-19A04739DB70}" dt="2024-03-04T20:21:06.730" v="698" actId="1076"/>
-          <ac:picMkLst>
-            <pc:docMk/>
-            <pc:sldMk cId="1768758862" sldId="310"/>
-            <ac:picMk id="5124" creationId="{131097A7-129E-2994-DCEE-D151EEB8CB30}"/>
-          </ac:picMkLst>
-        </pc:picChg>
-      </pc:sldChg>
-      <pc:sldChg chg="addSp delSp modSp add mod">
-        <pc:chgData name="Gabriel Silva dos Anjos" userId="8fb4646b515390da" providerId="LiveId" clId="{9DC39C1C-1C16-4384-A367-19A04739DB70}" dt="2024-03-04T20:25:14.658" v="733" actId="20577"/>
-        <pc:sldMkLst>
-          <pc:docMk/>
-          <pc:sldMk cId="3147094687" sldId="311"/>
-        </pc:sldMkLst>
-        <pc:spChg chg="mod">
-          <ac:chgData name="Gabriel Silva dos Anjos" userId="8fb4646b515390da" providerId="LiveId" clId="{9DC39C1C-1C16-4384-A367-19A04739DB70}" dt="2024-03-04T20:25:14.658" v="733" actId="20577"/>
-          <ac:spMkLst>
-            <pc:docMk/>
-            <pc:sldMk cId="3147094687" sldId="311"/>
-            <ac:spMk id="2" creationId="{12836FAF-9E2D-5A19-14E0-A9E2ED0AA355}"/>
-          </ac:spMkLst>
-        </pc:spChg>
-        <pc:spChg chg="add del mod">
-          <ac:chgData name="Gabriel Silva dos Anjos" userId="8fb4646b515390da" providerId="LiveId" clId="{9DC39C1C-1C16-4384-A367-19A04739DB70}" dt="2024-03-04T20:24:24.169" v="703"/>
-          <ac:spMkLst>
-            <pc:docMk/>
-            <pc:sldMk cId="3147094687" sldId="311"/>
-            <ac:spMk id="3" creationId="{1F7B443D-43C6-E0DE-D84E-3163EB102484}"/>
-          </ac:spMkLst>
-        </pc:spChg>
-        <pc:picChg chg="add mod">
-          <ac:chgData name="Gabriel Silva dos Anjos" userId="8fb4646b515390da" providerId="LiveId" clId="{9DC39C1C-1C16-4384-A367-19A04739DB70}" dt="2024-03-04T20:24:51.874" v="712" actId="1076"/>
-          <ac:picMkLst>
-            <pc:docMk/>
-            <pc:sldMk cId="3147094687" sldId="311"/>
-            <ac:picMk id="1026" creationId="{7B7C6954-4AAF-F831-6407-033E08E71DCC}"/>
-          </ac:picMkLst>
-        </pc:picChg>
-        <pc:picChg chg="del mod">
-          <ac:chgData name="Gabriel Silva dos Anjos" userId="8fb4646b515390da" providerId="LiveId" clId="{9DC39C1C-1C16-4384-A367-19A04739DB70}" dt="2024-03-04T20:24:22.908" v="702" actId="478"/>
-          <ac:picMkLst>
-            <pc:docMk/>
-            <pc:sldMk cId="3147094687" sldId="311"/>
-            <ac:picMk id="5124" creationId="{84E2BEEF-44DF-142B-8F87-7E1CDA8166DB}"/>
-          </ac:picMkLst>
-        </pc:picChg>
-      </pc:sldChg>
-      <pc:sldChg chg="modSp add">
-        <pc:chgData name="Gabriel Silva dos Anjos" userId="8fb4646b515390da" providerId="LiveId" clId="{9DC39C1C-1C16-4384-A367-19A04739DB70}" dt="2024-03-04T20:26:33.708" v="815" actId="20577"/>
-        <pc:sldMkLst>
-          <pc:docMk/>
-          <pc:sldMk cId="1477466870" sldId="312"/>
-        </pc:sldMkLst>
-        <pc:spChg chg="mod">
-          <ac:chgData name="Gabriel Silva dos Anjos" userId="8fb4646b515390da" providerId="LiveId" clId="{9DC39C1C-1C16-4384-A367-19A04739DB70}" dt="2024-03-04T20:26:12.157" v="792" actId="207"/>
-          <ac:spMkLst>
-            <pc:docMk/>
-            <pc:sldMk cId="1477466870" sldId="312"/>
-            <ac:spMk id="4" creationId="{F5D7CB50-17D4-8FEC-3FE2-D81663F3D300}"/>
-          </ac:spMkLst>
-        </pc:spChg>
-        <pc:spChg chg="mod">
-          <ac:chgData name="Gabriel Silva dos Anjos" userId="8fb4646b515390da" providerId="LiveId" clId="{9DC39C1C-1C16-4384-A367-19A04739DB70}" dt="2024-03-04T20:26:33.708" v="815" actId="20577"/>
-          <ac:spMkLst>
-            <pc:docMk/>
-            <pc:sldMk cId="1477466870" sldId="312"/>
-            <ac:spMk id="5" creationId="{553DC89E-3A71-6612-60A0-F86507E499B4}"/>
-          </ac:spMkLst>
-        </pc:spChg>
-      </pc:sldChg>
-      <pc:sldChg chg="addSp delSp modSp new mod">
-        <pc:chgData name="Gabriel Silva dos Anjos" userId="8fb4646b515390da" providerId="LiveId" clId="{9DC39C1C-1C16-4384-A367-19A04739DB70}" dt="2024-03-04T20:35:00.707" v="907" actId="1076"/>
-        <pc:sldMkLst>
-          <pc:docMk/>
-          <pc:sldMk cId="23983984" sldId="313"/>
-        </pc:sldMkLst>
-        <pc:spChg chg="mod">
-          <ac:chgData name="Gabriel Silva dos Anjos" userId="8fb4646b515390da" providerId="LiveId" clId="{9DC39C1C-1C16-4384-A367-19A04739DB70}" dt="2024-03-04T20:34:45.488" v="902" actId="20577"/>
-          <ac:spMkLst>
-            <pc:docMk/>
-            <pc:sldMk cId="23983984" sldId="313"/>
-            <ac:spMk id="2" creationId="{467C70A4-50EF-A812-C5AB-CF6FA72ACEB1}"/>
-          </ac:spMkLst>
-        </pc:spChg>
-        <pc:spChg chg="del">
-          <ac:chgData name="Gabriel Silva dos Anjos" userId="8fb4646b515390da" providerId="LiveId" clId="{9DC39C1C-1C16-4384-A367-19A04739DB70}" dt="2024-03-04T20:34:54.070" v="903" actId="22"/>
-          <ac:spMkLst>
-            <pc:docMk/>
-            <pc:sldMk cId="23983984" sldId="313"/>
-            <ac:spMk id="3" creationId="{63903D2D-1ADC-4305-A1C3-28CF5792C94E}"/>
-          </ac:spMkLst>
-        </pc:spChg>
-        <pc:picChg chg="add mod ord">
-          <ac:chgData name="Gabriel Silva dos Anjos" userId="8fb4646b515390da" providerId="LiveId" clId="{9DC39C1C-1C16-4384-A367-19A04739DB70}" dt="2024-03-04T20:35:00.707" v="907" actId="1076"/>
-          <ac:picMkLst>
-            <pc:docMk/>
-            <pc:sldMk cId="23983984" sldId="313"/>
-            <ac:picMk id="5" creationId="{A33F7A9F-E100-166B-9BE9-4481326B03F4}"/>
-          </ac:picMkLst>
-        </pc:picChg>
-      </pc:sldChg>
-      <pc:sldChg chg="addSp delSp modSp new mod modAnim">
-        <pc:chgData name="Gabriel Silva dos Anjos" userId="8fb4646b515390da" providerId="LiveId" clId="{9DC39C1C-1C16-4384-A367-19A04739DB70}" dt="2024-03-04T20:42:14.362" v="938" actId="1076"/>
-        <pc:sldMkLst>
-          <pc:docMk/>
-          <pc:sldMk cId="2464944670" sldId="314"/>
-        </pc:sldMkLst>
-        <pc:spChg chg="del">
-          <ac:chgData name="Gabriel Silva dos Anjos" userId="8fb4646b515390da" providerId="LiveId" clId="{9DC39C1C-1C16-4384-A367-19A04739DB70}" dt="2024-03-04T20:41:56.079" v="933" actId="478"/>
-          <ac:spMkLst>
-            <pc:docMk/>
-            <pc:sldMk cId="2464944670" sldId="314"/>
-            <ac:spMk id="2" creationId="{066369CB-B62C-198D-AE8B-8CA9E905B316}"/>
-          </ac:spMkLst>
-        </pc:spChg>
-        <pc:spChg chg="del">
-          <ac:chgData name="Gabriel Silva dos Anjos" userId="8fb4646b515390da" providerId="LiveId" clId="{9DC39C1C-1C16-4384-A367-19A04739DB70}" dt="2024-03-04T20:41:53.406" v="932"/>
-          <ac:spMkLst>
-            <pc:docMk/>
-            <pc:sldMk cId="2464944670" sldId="314"/>
-            <ac:spMk id="3" creationId="{ED63909B-9E2B-CA69-2924-1C750CEA845B}"/>
-          </ac:spMkLst>
-        </pc:spChg>
-        <pc:picChg chg="add mod">
-          <ac:chgData name="Gabriel Silva dos Anjos" userId="8fb4646b515390da" providerId="LiveId" clId="{9DC39C1C-1C16-4384-A367-19A04739DB70}" dt="2024-03-04T20:42:14.362" v="938" actId="1076"/>
-          <ac:picMkLst>
-            <pc:docMk/>
-            <pc:sldMk cId="2464944670" sldId="314"/>
-            <ac:picMk id="7" creationId="{12A345D5-7629-9263-4698-9C93B08D56DA}"/>
-          </ac:picMkLst>
-        </pc:picChg>
       </pc:sldChg>
     </pc:docChg>
   </pc:docChgLst>
@@ -1308,7 +249,7 @@
           <a:p>
             <a:fld id="{71BA8C7F-179C-418F-8B3C-89B5A104FD15}" type="datetimeFigureOut">
               <a:rPr lang="pt-BR" smtClean="0"/>
-              <a:t>04/03/2024</a:t>
+              <a:t>03/01/2026</a:t>
             </a:fld>
             <a:endParaRPr lang="pt-BR"/>
           </a:p>
@@ -1852,7 +793,7 @@
           <a:p>
             <a:fld id="{91963B7E-0CEE-4E9A-AE5C-A0FB9AE20B8C}" type="datetimeFigureOut">
               <a:rPr lang="pt-BR" smtClean="0"/>
-              <a:t>04/03/2024</a:t>
+              <a:t>03/01/2026</a:t>
             </a:fld>
             <a:endParaRPr lang="pt-BR"/>
           </a:p>
@@ -2150,7 +1091,7 @@
           <a:p>
             <a:fld id="{91963B7E-0CEE-4E9A-AE5C-A0FB9AE20B8C}" type="datetimeFigureOut">
               <a:rPr lang="pt-BR" smtClean="0"/>
-              <a:t>04/03/2024</a:t>
+              <a:t>03/01/2026</a:t>
             </a:fld>
             <a:endParaRPr lang="pt-BR"/>
           </a:p>
@@ -2342,7 +1283,7 @@
           <a:p>
             <a:fld id="{91963B7E-0CEE-4E9A-AE5C-A0FB9AE20B8C}" type="datetimeFigureOut">
               <a:rPr lang="pt-BR" smtClean="0"/>
-              <a:t>04/03/2024</a:t>
+              <a:t>03/01/2026</a:t>
             </a:fld>
             <a:endParaRPr lang="pt-BR"/>
           </a:p>
@@ -2603,7 +1544,7 @@
           <a:p>
             <a:fld id="{91963B7E-0CEE-4E9A-AE5C-A0FB9AE20B8C}" type="datetimeFigureOut">
               <a:rPr lang="pt-BR" smtClean="0"/>
-              <a:t>04/03/2024</a:t>
+              <a:t>03/01/2026</a:t>
             </a:fld>
             <a:endParaRPr lang="pt-BR"/>
           </a:p>
@@ -3027,7 +1968,7 @@
           <a:p>
             <a:fld id="{91963B7E-0CEE-4E9A-AE5C-A0FB9AE20B8C}" type="datetimeFigureOut">
               <a:rPr lang="pt-BR" smtClean="0"/>
-              <a:t>04/03/2024</a:t>
+              <a:t>03/01/2026</a:t>
             </a:fld>
             <a:endParaRPr lang="pt-BR"/>
           </a:p>
@@ -3564,7 +2505,7 @@
           <a:p>
             <a:fld id="{91963B7E-0CEE-4E9A-AE5C-A0FB9AE20B8C}" type="datetimeFigureOut">
               <a:rPr lang="pt-BR" smtClean="0"/>
-              <a:t>04/03/2024</a:t>
+              <a:t>03/01/2026</a:t>
             </a:fld>
             <a:endParaRPr lang="pt-BR"/>
           </a:p>
@@ -4428,7 +3369,7 @@
           <a:p>
             <a:fld id="{91963B7E-0CEE-4E9A-AE5C-A0FB9AE20B8C}" type="datetimeFigureOut">
               <a:rPr lang="pt-BR" smtClean="0"/>
-              <a:t>04/03/2024</a:t>
+              <a:t>03/01/2026</a:t>
             </a:fld>
             <a:endParaRPr lang="pt-BR"/>
           </a:p>
@@ -4598,7 +3539,7 @@
           <a:p>
             <a:fld id="{91963B7E-0CEE-4E9A-AE5C-A0FB9AE20B8C}" type="datetimeFigureOut">
               <a:rPr lang="pt-BR" smtClean="0"/>
-              <a:t>04/03/2024</a:t>
+              <a:t>03/01/2026</a:t>
             </a:fld>
             <a:endParaRPr lang="pt-BR"/>
           </a:p>
@@ -4782,7 +3723,7 @@
           <a:p>
             <a:fld id="{91963B7E-0CEE-4E9A-AE5C-A0FB9AE20B8C}" type="datetimeFigureOut">
               <a:rPr lang="pt-BR" smtClean="0"/>
-              <a:t>04/03/2024</a:t>
+              <a:t>03/01/2026</a:t>
             </a:fld>
             <a:endParaRPr lang="pt-BR"/>
           </a:p>
@@ -4952,7 +3893,7 @@
           <a:p>
             <a:fld id="{91963B7E-0CEE-4E9A-AE5C-A0FB9AE20B8C}" type="datetimeFigureOut">
               <a:rPr lang="pt-BR" smtClean="0"/>
-              <a:t>04/03/2024</a:t>
+              <a:t>03/01/2026</a:t>
             </a:fld>
             <a:endParaRPr lang="pt-BR"/>
           </a:p>
@@ -5196,7 +4137,7 @@
           <a:p>
             <a:fld id="{91963B7E-0CEE-4E9A-AE5C-A0FB9AE20B8C}" type="datetimeFigureOut">
               <a:rPr lang="pt-BR" smtClean="0"/>
-              <a:t>04/03/2024</a:t>
+              <a:t>03/01/2026</a:t>
             </a:fld>
             <a:endParaRPr lang="pt-BR"/>
           </a:p>
@@ -5432,7 +4373,7 @@
           <a:p>
             <a:fld id="{91963B7E-0CEE-4E9A-AE5C-A0FB9AE20B8C}" type="datetimeFigureOut">
               <a:rPr lang="pt-BR" smtClean="0"/>
-              <a:t>04/03/2024</a:t>
+              <a:t>03/01/2026</a:t>
             </a:fld>
             <a:endParaRPr lang="pt-BR"/>
           </a:p>
@@ -5898,7 +4839,7 @@
           <a:p>
             <a:fld id="{91963B7E-0CEE-4E9A-AE5C-A0FB9AE20B8C}" type="datetimeFigureOut">
               <a:rPr lang="pt-BR" smtClean="0"/>
-              <a:t>04/03/2024</a:t>
+              <a:t>03/01/2026</a:t>
             </a:fld>
             <a:endParaRPr lang="pt-BR"/>
           </a:p>
@@ -6016,7 +4957,7 @@
           <a:p>
             <a:fld id="{91963B7E-0CEE-4E9A-AE5C-A0FB9AE20B8C}" type="datetimeFigureOut">
               <a:rPr lang="pt-BR" smtClean="0"/>
-              <a:t>04/03/2024</a:t>
+              <a:t>03/01/2026</a:t>
             </a:fld>
             <a:endParaRPr lang="pt-BR"/>
           </a:p>
@@ -6111,7 +5052,7 @@
           <a:p>
             <a:fld id="{91963B7E-0CEE-4E9A-AE5C-A0FB9AE20B8C}" type="datetimeFigureOut">
               <a:rPr lang="pt-BR" smtClean="0"/>
-              <a:t>04/03/2024</a:t>
+              <a:t>03/01/2026</a:t>
             </a:fld>
             <a:endParaRPr lang="pt-BR"/>
           </a:p>
@@ -6366,7 +5307,7 @@
           <a:p>
             <a:fld id="{91963B7E-0CEE-4E9A-AE5C-A0FB9AE20B8C}" type="datetimeFigureOut">
               <a:rPr lang="pt-BR" smtClean="0"/>
-              <a:t>04/03/2024</a:t>
+              <a:t>03/01/2026</a:t>
             </a:fld>
             <a:endParaRPr lang="pt-BR"/>
           </a:p>
@@ -6666,7 +5607,7 @@
           <a:p>
             <a:fld id="{91963B7E-0CEE-4E9A-AE5C-A0FB9AE20B8C}" type="datetimeFigureOut">
               <a:rPr lang="pt-BR" smtClean="0"/>
-              <a:t>04/03/2024</a:t>
+              <a:t>03/01/2026</a:t>
             </a:fld>
             <a:endParaRPr lang="pt-BR"/>
           </a:p>
@@ -6900,7 +5841,7 @@
           <a:p>
             <a:fld id="{91963B7E-0CEE-4E9A-AE5C-A0FB9AE20B8C}" type="datetimeFigureOut">
               <a:rPr lang="pt-BR" smtClean="0"/>
-              <a:t>04/03/2024</a:t>
+              <a:t>03/01/2026</a:t>
             </a:fld>
             <a:endParaRPr lang="pt-BR"/>
           </a:p>
@@ -7716,7 +6657,11 @@
             <a:pPr lvl="1"/>
             <a:r>
               <a:rPr lang="pt-BR" dirty="0"/>
-              <a:t>É importante vim </a:t>
+              <a:t>É </a:t>
+            </a:r>
+            <a:r>
+              <a:rPr lang="pt-BR"/>
+              <a:t>importante vir </a:t>
             </a:r>
             <a:r>
               <a:rPr lang="pt-BR" dirty="0" err="1"/>
